--- a/prezentacie/c08w.pptx
+++ b/prezentacie/c08w.pptx
@@ -6473,7 +6473,7 @@
             </a:r>
             <a:r>
               <a:rPr lang="sk-SK" sz="2400" dirty="0"/>
-              <a:t>, ak je počet pokusov menší ako 1 alebo ak sme vyhrali, ináč vráti </a:t>
+              <a:t>, ak je počet pokusov menší ako 1 alebo ak sme vyhrali, inak vráti </a:t>
             </a:r>
             <a:r>
               <a:rPr lang="sk-SK" sz="2400" dirty="0" err="1">
@@ -6622,7 +6622,7 @@
             </a:r>
             <a:r>
               <a:rPr lang="sk-SK" sz="2400" dirty="0"/>
-              <a:t> - vráti hádané slovo. Bonus: slovo vráti, iba ak hra skončila, ináč vyhodí výnimku</a:t>
+              <a:t> - vráti hádané slovo. Bonus: slovo vráti, iba ak hra skončila, inak vyhodí výnimku</a:t>
             </a:r>
           </a:p>
           <a:p>
